--- a/curso_es/pptx/S71.pptx
+++ b/curso_es/pptx/S71.pptx
@@ -3918,7 +3918,7 @@
                           </a:solidFill>
                           <a:latin typeface="Nunito Sans"/>
                         </a:rPr>
-                        <a:t>«Ejemplo inventado: el lunes Chen cargó ocho kilos»</a:t>
+                        <a:t>«Ejemplo inventado: el lunes un alumno cargó ocho kilos»</a:t>
                       </a:r>
                     </a:p>
                   </a:txBody>
@@ -4078,7 +4078,7 @@
                 </a:solidFill>
                 <a:latin typeface="Fredoka"/>
               </a:rPr>
-              <a:t>Caso 2 · Kevin y los fuegos</a:t>
+              <a:t>Caso 2 · Un chico y los fuegos</a:t>
             </a:r>
           </a:p>
         </p:txBody>
@@ -4160,7 +4160,7 @@
                 </a:solidFill>
                 <a:latin typeface="Nunito Sans"/>
               </a:rPr>
-              <a:t>Kevin quiere convencer a su familia, por escrito, para ir con su cuadrilla a los fuegos artificiales de Aste Nagusia.</a:t>
+              <a:t>Un chico quiere convencer a su familia, por escrito, para ir con su cuadrilla a los fuegos artificiales de Aste Nagusia.</a:t>
             </a:r>
           </a:p>
         </p:txBody>
@@ -4233,7 +4233,7 @@
                 </a:solidFill>
                 <a:latin typeface="Nunito Sans"/>
               </a:rPr>
-              <a:t>Razones: «Iremos cuatro juntos y volveremos en metro a las once». Ejemplo: «El año pasado fue Omar y todo salió bien».</a:t>
+              <a:t>Razones: «Iremos cuatro juntos y volveremos en metro a las once». Ejemplo: «El año pasado fue un amigo y todo salió bien».</a:t>
             </a:r>
           </a:p>
           <a:p>
@@ -4469,7 +4469,7 @@
                 </a:solidFill>
                 <a:latin typeface="Nunito Sans"/>
               </a:rPr>
-              <a:t>Aitor defiende el móvil en el recreo y escribe: «Alguien dirá que los que quieren prohibirlo odian la tecnología. Pero eso es ridículo».</a:t>
+              <a:t>Un chico defiende el móvil en el recreo y escribe: «Alguien dirá que los que quieren prohibirlo odian la tecnología. Pero eso es ridículo».</a:t>
             </a:r>
           </a:p>
         </p:txBody>
@@ -4517,7 +4517,7 @@
                 </a:solidFill>
                 <a:latin typeface="Nunito Sans"/>
               </a:rPr>
-              <a:t>Aitor ha escrito una objeción y la ha respondido. ¿Su argumento está completo?</a:t>
+              <a:t>Ese chico ha escrito una objeción y la ha respondido. ¿Su argumento está completo?</a:t>
             </a:r>
           </a:p>
           <a:p>
@@ -6533,7 +6533,7 @@
                 </a:solidFill>
                 <a:latin typeface="Nunito Sans"/>
               </a:rPr>
-              <a:t>Leire escribe en el grupo de clase: «Deberían dejarnos usar el móvil en el recreo. Y punto».</a:t>
+              <a:t>Una chica escribe en el grupo de clase: «Deberían dejarnos usar el móvil en el recreo. Y punto».</a:t>
             </a:r>
           </a:p>
         </p:txBody>
